--- a/demo/Incident_Commander_Presentation.pptx
+++ b/demo/Incident_Commander_Presentation.pptx
@@ -5961,7 +5961,7 @@
                 </a:solidFill>
                 <a:latin typeface="Calibri"/>
               </a:rPr>
-              <a:t>12 | APPENDIX B  ·  PER-SLICE ABLATION RESULTS</a:t>
+              <a:t>12 | APPENDIX B  ·  PER-SLICE ABLATION RESULTS  ·  12 BUNDLES, 24 RUNS</a:t>
             </a:r>
           </a:p>
         </p:txBody>
@@ -6074,7 +6074,7 @@
                 </a:solidFill>
                 <a:latin typeface="Calibri"/>
               </a:rPr>
-              <a:t>The full ablation, laid out. Deployment-induced is the easy case.</a:t>
+              <a:t>The full ablation on the wider corpus. Deployment-induced remains the easy case; hard slices still need probes.</a:t>
             </a:r>
           </a:p>
         </p:txBody>
@@ -6234,7 +6234,7 @@
                           </a:solidFill>
                           <a:latin typeface="Calibri"/>
                         </a:rPr>
-                        <a:t>3</a:t>
+                        <a:t>4</a:t>
                       </a:r>
                     </a:p>
                   </a:txBody>
@@ -6257,7 +6257,7 @@
                           </a:solidFill>
                           <a:latin typeface="Calibri"/>
                         </a:rPr>
-                        <a:t>100% (3/3)</a:t>
+                        <a:t>100% (4/4)</a:t>
                       </a:r>
                     </a:p>
                   </a:txBody>
@@ -6280,7 +6280,7 @@
                           </a:solidFill>
                           <a:latin typeface="Calibri"/>
                         </a:rPr>
-                        <a:t>0% (0/3)</a:t>
+                        <a:t>0% (0/4)</a:t>
                       </a:r>
                     </a:p>
                   </a:txBody>
@@ -6516,7 +6516,7 @@
                           </a:solidFill>
                           <a:latin typeface="Calibri"/>
                         </a:rPr>
-                        <a:t>1</a:t>
+                        <a:t>2</a:t>
                       </a:r>
                     </a:p>
                   </a:txBody>
@@ -6539,7 +6539,7 @@
                           </a:solidFill>
                           <a:latin typeface="Calibri"/>
                         </a:rPr>
-                        <a:t>100% (1/1)</a:t>
+                        <a:t>100% (2/2)</a:t>
                       </a:r>
                     </a:p>
                   </a:txBody>
@@ -6562,7 +6562,7 @@
                           </a:solidFill>
                           <a:latin typeface="Calibri"/>
                         </a:rPr>
-                        <a:t>0% (0/1)</a:t>
+                        <a:t>0% (0/2)</a:t>
                       </a:r>
                     </a:p>
                   </a:txBody>
@@ -6610,7 +6610,7 @@
                           </a:solidFill>
                           <a:latin typeface="Calibri"/>
                         </a:rPr>
-                        <a:t>1</a:t>
+                        <a:t>3</a:t>
                       </a:r>
                     </a:p>
                   </a:txBody>
@@ -6633,7 +6633,7 @@
                           </a:solidFill>
                           <a:latin typeface="Calibri"/>
                         </a:rPr>
-                        <a:t>100% (1/1)</a:t>
+                        <a:t>100% (3/3)</a:t>
                       </a:r>
                     </a:p>
                   </a:txBody>
@@ -6656,7 +6656,7 @@
                           </a:solidFill>
                           <a:latin typeface="Calibri"/>
                         </a:rPr>
-                        <a:t>100% (1/1)</a:t>
+                        <a:t>100% (3/3)</a:t>
                       </a:r>
                     </a:p>
                   </a:txBody>
@@ -6704,7 +6704,7 @@
                           </a:solidFill>
                           <a:latin typeface="Calibri"/>
                         </a:rPr>
-                        <a:t>8</a:t>
+                        <a:t>12</a:t>
                       </a:r>
                     </a:p>
                   </a:txBody>
@@ -6727,7 +6727,7 @@
                           </a:solidFill>
                           <a:latin typeface="Calibri"/>
                         </a:rPr>
-                        <a:t>100% (8/8)</a:t>
+                        <a:t>100% (12/12)</a:t>
                       </a:r>
                     </a:p>
                   </a:txBody>
@@ -6750,7 +6750,7 @@
                           </a:solidFill>
                           <a:latin typeface="Calibri"/>
                         </a:rPr>
-                        <a:t>12% (1/8)</a:t>
+                        <a:t>25% (3/12)</a:t>
                       </a:r>
                     </a:p>
                   </a:txBody>
@@ -6799,7 +6799,7 @@
                 </a:solidFill>
                 <a:latin typeface="Calibri"/>
               </a:rPr>
-              <a:t>For each of the 5 hard-slice bundles, OFF picks the wrong hypothesis; ON picks the right one.</a:t>
+              <a:t>For each of the 6 hard-slice bundles, OFF picks the wrong hypothesis; ON picks the right one.</a:t>
             </a:r>
           </a:p>
         </p:txBody>
@@ -12073,7 +12073,7 @@
                 </a:solidFill>
                 <a:latin typeface="Calibri"/>
               </a:rPr>
-              <a:t>06 | THE PROOF  ·  ABLATION ACROSS 8 BUNDLES, 16 RUNS</a:t>
+              <a:t>06 | THE PROOF  ·  ABLATION ACROSS 12 BUNDLES, 24 RUNS</a:t>
             </a:r>
           </a:p>
         </p:txBody>
@@ -12431,7 +12431,7 @@
                 </a:solidFill>
                 <a:latin typeface="Calibri"/>
               </a:rPr>
-              <a:t>0 % → 100 % (0/5 → 5/5)</a:t>
+              <a:t>0 % → 100 % (0/6 → 6/6)</a:t>
             </a:r>
           </a:p>
         </p:txBody>
@@ -12637,7 +12637,7 @@
                 </a:solidFill>
                 <a:latin typeface="Calibri"/>
               </a:rPr>
-              <a:t>8 / 8 bundles correct</a:t>
+              <a:t>12 / 12 bundles correct</a:t>
             </a:r>
           </a:p>
         </p:txBody>
@@ -13049,7 +13049,7 @@
                 </a:solidFill>
                 <a:latin typeface="Calibri"/>
               </a:rPr>
-              <a:t>baseline 0.352  ·  calibration</a:t>
+              <a:t>baseline 0.287  ·  calibration</a:t>
             </a:r>
           </a:p>
         </p:txBody>
@@ -15227,7 +15227,7 @@
                 </a:solidFill>
                 <a:latin typeface="Calibri"/>
               </a:rPr>
-              <a:t>8 authored bundles across 5 slices</a:t>
+              <a:t>12 authored bundles across 5 slices</a:t>
             </a:r>
           </a:p>
         </p:txBody>
@@ -16257,7 +16257,7 @@
                 </a:solidFill>
                 <a:latin typeface="Calibri"/>
               </a:rPr>
-              <a:t>09 | ROADMAP  ·  FOUR ITEMS, IN ORDER, TO THE FINAL PHASE</a:t>
+              <a:t>09 | ROADMAP  ·  SIX LADDER STAGES SHIPPED  ·  THREE REMAIN</a:t>
             </a:r>
           </a:p>
         </p:txBody>
@@ -16370,7 +16370,7 @@
                 </a:solidFill>
                 <a:latin typeface="Calibri"/>
               </a:rPr>
-              <a:t>Each item is scoped, sized, and unblocks the next.</a:t>
+              <a:t>The nine-step production ladder from docs/ROADMAP.md. Each remaining stage names its tool.</a:t>
             </a:r>
           </a:p>
         </p:txBody>
@@ -16453,7 +16453,7 @@
                 </a:solidFill>
                 <a:latin typeface="Calibri"/>
               </a:rPr>
-              <a:t>1</a:t>
+              <a:t>✓</a:t>
             </a:r>
           </a:p>
         </p:txBody>
@@ -16492,7 +16492,7 @@
                 </a:solidFill>
                 <a:latin typeface="Calibri"/>
               </a:rPr>
-              <a:t>Read-only Prometheus connector</a:t>
+              <a:t>Policy engine + verification loop + CIS</a:t>
             </a:r>
           </a:p>
         </p:txBody>
@@ -16531,7 +16531,7 @@
                 </a:solidFill>
                 <a:latin typeface="Calibri"/>
               </a:rPr>
-              <a:t>Turn fixture probes into live telemetry. Highest-leverage unlock for real-world evaluation.</a:t>
+              <a:t>OPA + Rego gate replaces the Approve button. Verification re-checks recovery; failure auto-reverts. Customer-Impact Score routes urgency without ever touching diagnosis.</a:t>
             </a:r>
           </a:p>
         </p:txBody>
@@ -16614,7 +16614,7 @@
                 </a:solidFill>
                 <a:latin typeface="Calibri"/>
               </a:rPr>
-              <a:t>≈ 1 week</a:t>
+              <a:t>shipped Sep 12–16</a:t>
             </a:r>
           </a:p>
         </p:txBody>
@@ -16732,7 +16732,7 @@
                 </a:solidFill>
                 <a:latin typeface="Calibri"/>
               </a:rPr>
-              <a:t>2</a:t>
+              <a:t>✓</a:t>
             </a:r>
           </a:p>
         </p:txBody>
@@ -16771,7 +16771,7 @@
                 </a:solidFill>
                 <a:latin typeface="Calibri"/>
               </a:rPr>
-              <a:t>Grow the corpus from real postmortems</a:t>
+              <a:t>Dynamic LLM triage + OTLP adapter + corpus 8→12</a:t>
             </a:r>
           </a:p>
         </p:txBody>
@@ -16810,7 +16810,7 @@
                 </a:solidFill>
                 <a:latin typeface="Calibri"/>
               </a:rPr>
-              <a:t>Target 30+ bundles across all five slices. Unlocks the first honest reliability diagram.</a:t>
+              <a:t>LLM generates hypotheses live from raw context with anti-hallucination filter. Spec-compliant OTLP JSON ingested via NiFi flow. Four new bundles exercise every new capability.</a:t>
             </a:r>
           </a:p>
         </p:txBody>
@@ -16893,7 +16893,7 @@
                 </a:solidFill>
                 <a:latin typeface="Calibri"/>
               </a:rPr>
-              <a:t>≈ 3 weeks</a:t>
+              <a:t>shipped Sep 14–19</a:t>
             </a:r>
           </a:p>
         </p:txBody>
@@ -17050,7 +17050,7 @@
                 </a:solidFill>
                 <a:latin typeface="Calibri"/>
               </a:rPr>
-              <a:t>LLM-driven probe interpretation</a:t>
+              <a:t>Live OTel Collector + shadow mode</a:t>
             </a:r>
           </a:p>
         </p:txBody>
@@ -17089,7 +17089,7 @@
                 </a:solidFill>
                 <a:latin typeface="Calibri"/>
               </a:rPr>
-              <a:t>Removes the three-family ceiling — system reads probe results for arbitrary signal types.</a:t>
+              <a:t>OTLP adapter is DONE — remaining work is wiring a real OpenTelemetry Collector to NiFi and adding the shadow-mode toggle that runs against real incidents without executing.</a:t>
             </a:r>
           </a:p>
         </p:txBody>
@@ -17329,7 +17329,7 @@
                 </a:solidFill>
                 <a:latin typeface="Calibri"/>
               </a:rPr>
-              <a:t>Container-orchestrated canary executor</a:t>
+              <a:t>Argo Rollouts execution + formal EIG</a:t>
             </a:r>
           </a:p>
         </p:txBody>
@@ -17368,7 +17368,7 @@
                 </a:solidFill>
                 <a:latin typeface="Calibri"/>
               </a:rPr>
-              <a:t>The intervention primitive fires live against a real service; safety envelope enforced by k8s.</a:t>
+              <a:t>Interventions fire against a real k8s canary controller (Argo Rollouts). Divergence heuristic in probe selection is replaced by formal Expected Information Gain (Chaloner &amp; Verdinelli).</a:t>
             </a:r>
           </a:p>
         </p:txBody>
@@ -17451,7 +17451,7 @@
                 </a:solidFill>
                 <a:latin typeface="Calibri"/>
               </a:rPr>
-              <a:t>≈ 3 weeks</a:t>
+              <a:t>≈ 4 weeks</a:t>
             </a:r>
           </a:p>
         </p:txBody>

--- a/demo/Incident_Commander_Presentation.pptx
+++ b/demo/Incident_Commander_Presentation.pptx
@@ -17,6 +17,7 @@
     <p:sldId id="265" r:id="rId16"/>
     <p:sldId id="266" r:id="rId17"/>
     <p:sldId id="267" r:id="rId18"/>
+    <p:sldId id="268" r:id="rId19"/>
   </p:sldIdLst>
   <p:sldSz cx="12191695" cy="6858000" type="screen4x3"/>
   <p:notesSz cx="6858000" cy="9144000"/>
@@ -4901,7 +4902,7 @@
                 </a:solidFill>
                 <a:latin typeface="Calibri"/>
               </a:rPr>
-              <a:t>11 / 12</a:t>
+              <a:t>11 / 13</a:t>
             </a:r>
           </a:p>
         </p:txBody>
@@ -6000,7 +6001,7 @@
                 </a:solidFill>
                 <a:latin typeface="Calibri"/>
               </a:rPr>
-              <a:t>12 / 12</a:t>
+              <a:t>12 / 13</a:t>
             </a:r>
           </a:p>
         </p:txBody>
@@ -7081,6 +7082,425 @@
 </p:sld>
 </file>
 
+<file path=ppt/slides/slide13.xml><?xml version="1.0" encoding="utf-8"?>
+<p:sld xmlns:a="http://schemas.openxmlformats.org/drawingml/2006/main" xmlns:p="http://schemas.openxmlformats.org/presentationml/2006/main" xmlns:r="http://schemas.openxmlformats.org/officeDocument/2006/relationships">
+  <p:cSld>
+    <p:spTree>
+      <p:nvGrpSpPr>
+        <p:cNvPr id="1" name=""/>
+        <p:cNvGrpSpPr/>
+        <p:nvPr/>
+      </p:nvGrpSpPr>
+      <p:grpSpPr/>
+      <p:cxnSp>
+        <p:nvCxnSpPr>
+          <p:cNvPr id="2" name="Connector 1"/>
+          <p:cNvCxnSpPr/>
+          <p:nvPr/>
+        </p:nvCxnSpPr>
+        <p:spPr>
+          <a:xfrm>
+            <a:off x="365760" y="822960"/>
+            <a:ext cx="11460175" cy="0"/>
+          </a:xfrm>
+          <a:prstGeom prst="line">
+            <a:avLst/>
+          </a:prstGeom>
+          <a:ln w="9525">
+            <a:solidFill>
+              <a:srgbClr val="CBD5E1"/>
+            </a:solidFill>
+          </a:ln>
+        </p:spPr>
+        <p:style>
+          <a:lnRef idx="2">
+            <a:schemeClr val="accent1"/>
+          </a:lnRef>
+          <a:fillRef idx="0">
+            <a:schemeClr val="accent1"/>
+          </a:fillRef>
+          <a:effectRef idx="1">
+            <a:schemeClr val="accent1"/>
+          </a:effectRef>
+          <a:fontRef idx="minor">
+            <a:schemeClr val="tx1"/>
+          </a:fontRef>
+        </p:style>
+      </p:cxnSp>
+      <p:sp>
+        <p:nvSpPr>
+          <p:cNvPr id="3" name="TextBox 2"/>
+          <p:cNvSpPr txBox="1"/>
+          <p:nvPr/>
+        </p:nvSpPr>
+        <p:spPr>
+          <a:xfrm>
+            <a:off x="365760" y="320040"/>
+            <a:ext cx="11460175" cy="502920"/>
+          </a:xfrm>
+          <a:prstGeom prst="rect">
+            <a:avLst/>
+          </a:prstGeom>
+          <a:noFill/>
+        </p:spPr>
+        <p:txBody>
+          <a:bodyPr wrap="none" lIns="0" rIns="0" tIns="0" bIns="0">
+            <a:spAutoFit/>
+          </a:bodyPr>
+          <a:lstStyle/>
+          <a:p>
+            <a:r>
+              <a:rPr sz="1400" b="1">
+                <a:solidFill>
+                  <a:srgbClr val="0F172A"/>
+                </a:solidFill>
+                <a:latin typeface="Calibri"/>
+              </a:rPr>
+              <a:t>13 | APPENDIX C  ·  INDUSTRY FAILURE MODES  ·  WHAT WE DON'T FALL INTO</a:t>
+            </a:r>
+          </a:p>
+        </p:txBody>
+      </p:sp>
+      <p:sp>
+        <p:nvSpPr>
+          <p:cNvPr id="4" name="TextBox 3"/>
+          <p:cNvSpPr txBox="1"/>
+          <p:nvPr/>
+        </p:nvSpPr>
+        <p:spPr>
+          <a:xfrm>
+            <a:off x="365760" y="896112"/>
+            <a:ext cx="10362895" cy="365760"/>
+          </a:xfrm>
+          <a:prstGeom prst="rect">
+            <a:avLst/>
+          </a:prstGeom>
+          <a:noFill/>
+        </p:spPr>
+        <p:txBody>
+          <a:bodyPr wrap="none" lIns="0" rIns="0" tIns="0" bIns="0">
+            <a:spAutoFit/>
+          </a:bodyPr>
+          <a:lstStyle/>
+          <a:p>
+            <a:r>
+              <a:rPr sz="1100">
+                <a:solidFill>
+                  <a:srgbClr val="64748B"/>
+                </a:solidFill>
+                <a:latin typeface="Calibri"/>
+              </a:rPr>
+              <a:t>Eleven documented failure modes in the agentic-AI DevOps literature. Each maps to a shipped module.</a:t>
+            </a:r>
+          </a:p>
+        </p:txBody>
+      </p:sp>
+      <p:sp>
+        <p:nvSpPr>
+          <p:cNvPr id="5" name="TextBox 4"/>
+          <p:cNvSpPr txBox="1"/>
+          <p:nvPr/>
+        </p:nvSpPr>
+        <p:spPr>
+          <a:xfrm>
+            <a:off x="10911535" y="320040"/>
+            <a:ext cx="1005840" cy="320040"/>
+          </a:xfrm>
+          <a:prstGeom prst="rect">
+            <a:avLst/>
+          </a:prstGeom>
+          <a:noFill/>
+        </p:spPr>
+        <p:txBody>
+          <a:bodyPr wrap="none" lIns="0" rIns="0">
+            <a:spAutoFit/>
+          </a:bodyPr>
+          <a:lstStyle/>
+          <a:p>
+            <a:pPr algn="r"/>
+            <a:r>
+              <a:rPr sz="900">
+                <a:solidFill>
+                  <a:srgbClr val="64748B"/>
+                </a:solidFill>
+                <a:latin typeface="Calibri"/>
+              </a:rPr>
+              <a:t>13 / 13</a:t>
+            </a:r>
+          </a:p>
+        </p:txBody>
+      </p:sp>
+      <p:pic>
+        <p:nvPicPr>
+          <p:cNvPr id="6" name="Picture 5" descr="failure_modes_slide.png"/>
+          <p:cNvPicPr>
+            <a:picLocks noChangeAspect="1"/>
+          </p:cNvPicPr>
+          <p:nvPr/>
+        </p:nvPicPr>
+        <p:blipFill>
+          <a:blip r:embed="rId2"/>
+          <a:stretch>
+            <a:fillRect/>
+          </a:stretch>
+        </p:blipFill>
+        <p:spPr>
+          <a:xfrm>
+            <a:off x="380847" y="1371600"/>
+            <a:ext cx="11430000" cy="6400800"/>
+          </a:xfrm>
+          <a:prstGeom prst="rect">
+            <a:avLst/>
+          </a:prstGeom>
+        </p:spPr>
+      </p:pic>
+      <p:cxnSp>
+        <p:nvCxnSpPr>
+          <p:cNvPr id="7" name="Connector 6"/>
+          <p:cNvCxnSpPr/>
+          <p:nvPr/>
+        </p:nvCxnSpPr>
+        <p:spPr>
+          <a:xfrm>
+            <a:off x="365760" y="6355080"/>
+            <a:ext cx="11460175" cy="0"/>
+          </a:xfrm>
+          <a:prstGeom prst="line">
+            <a:avLst/>
+          </a:prstGeom>
+          <a:ln w="9525">
+            <a:solidFill>
+              <a:srgbClr val="CBD5E1"/>
+            </a:solidFill>
+          </a:ln>
+        </p:spPr>
+        <p:style>
+          <a:lnRef idx="2">
+            <a:schemeClr val="accent1"/>
+          </a:lnRef>
+          <a:fillRef idx="0">
+            <a:schemeClr val="accent1"/>
+          </a:fillRef>
+          <a:effectRef idx="1">
+            <a:schemeClr val="accent1"/>
+          </a:effectRef>
+          <a:fontRef idx="minor">
+            <a:schemeClr val="tx1"/>
+          </a:fontRef>
+        </p:style>
+      </p:cxnSp>
+      <p:sp>
+        <p:nvSpPr>
+          <p:cNvPr id="8" name="TextBox 7"/>
+          <p:cNvSpPr txBox="1"/>
+          <p:nvPr/>
+        </p:nvSpPr>
+        <p:spPr>
+          <a:xfrm>
+            <a:off x="365760" y="6446520"/>
+            <a:ext cx="2194560" cy="256032"/>
+          </a:xfrm>
+          <a:prstGeom prst="rect">
+            <a:avLst/>
+          </a:prstGeom>
+          <a:noFill/>
+        </p:spPr>
+        <p:txBody>
+          <a:bodyPr wrap="none" lIns="0" rIns="0" tIns="0" bIns="0">
+            <a:spAutoFit/>
+          </a:bodyPr>
+          <a:lstStyle/>
+          <a:p>
+            <a:r>
+              <a:rPr sz="800" b="1">
+                <a:solidFill>
+                  <a:srgbClr val="64748B"/>
+                </a:solidFill>
+                <a:latin typeface="Calibri"/>
+              </a:rPr>
+              <a:t>PREPARED BY</a:t>
+            </a:r>
+          </a:p>
+        </p:txBody>
+      </p:sp>
+      <p:sp>
+        <p:nvSpPr>
+          <p:cNvPr id="9" name="TextBox 8"/>
+          <p:cNvSpPr txBox="1"/>
+          <p:nvPr/>
+        </p:nvSpPr>
+        <p:spPr>
+          <a:xfrm>
+            <a:off x="365760" y="6629400"/>
+            <a:ext cx="2194560" cy="256032"/>
+          </a:xfrm>
+          <a:prstGeom prst="rect">
+            <a:avLst/>
+          </a:prstGeom>
+          <a:noFill/>
+        </p:spPr>
+        <p:txBody>
+          <a:bodyPr wrap="none" lIns="0" rIns="0" tIns="0" bIns="0">
+            <a:spAutoFit/>
+          </a:bodyPr>
+          <a:lstStyle/>
+          <a:p>
+            <a:r>
+              <a:rPr sz="1000" b="1">
+                <a:solidFill>
+                  <a:srgbClr val="0F172A"/>
+                </a:solidFill>
+                <a:latin typeface="Calibri"/>
+              </a:rPr>
+              <a:t>Team Cairo</a:t>
+            </a:r>
+          </a:p>
+        </p:txBody>
+      </p:sp>
+      <p:sp>
+        <p:nvSpPr>
+          <p:cNvPr id="10" name="TextBox 9"/>
+          <p:cNvSpPr txBox="1"/>
+          <p:nvPr/>
+        </p:nvSpPr>
+        <p:spPr>
+          <a:xfrm>
+            <a:off x="3108960" y="6446520"/>
+            <a:ext cx="2194560" cy="256032"/>
+          </a:xfrm>
+          <a:prstGeom prst="rect">
+            <a:avLst/>
+          </a:prstGeom>
+          <a:noFill/>
+        </p:spPr>
+        <p:txBody>
+          <a:bodyPr wrap="none" lIns="0" rIns="0" tIns="0" bIns="0">
+            <a:spAutoFit/>
+          </a:bodyPr>
+          <a:lstStyle/>
+          <a:p>
+            <a:r>
+              <a:rPr sz="800" b="1">
+                <a:solidFill>
+                  <a:srgbClr val="64748B"/>
+                </a:solidFill>
+                <a:latin typeface="Calibri"/>
+              </a:rPr>
+              <a:t>REPORTING PERIOD</a:t>
+            </a:r>
+          </a:p>
+        </p:txBody>
+      </p:sp>
+      <p:sp>
+        <p:nvSpPr>
+          <p:cNvPr id="11" name="TextBox 10"/>
+          <p:cNvSpPr txBox="1"/>
+          <p:nvPr/>
+        </p:nvSpPr>
+        <p:spPr>
+          <a:xfrm>
+            <a:off x="3108960" y="6629400"/>
+            <a:ext cx="2194560" cy="256032"/>
+          </a:xfrm>
+          <a:prstGeom prst="rect">
+            <a:avLst/>
+          </a:prstGeom>
+          <a:noFill/>
+        </p:spPr>
+        <p:txBody>
+          <a:bodyPr wrap="none" lIns="0" rIns="0" tIns="0" bIns="0">
+            <a:spAutoFit/>
+          </a:bodyPr>
+          <a:lstStyle/>
+          <a:p>
+            <a:r>
+              <a:rPr sz="1000" b="1">
+                <a:solidFill>
+                  <a:srgbClr val="0F172A"/>
+                </a:solidFill>
+                <a:latin typeface="Calibri"/>
+              </a:rPr>
+              <a:t>2026.07 – 2026.09</a:t>
+            </a:r>
+          </a:p>
+        </p:txBody>
+      </p:sp>
+      <p:sp>
+        <p:nvSpPr>
+          <p:cNvPr id="12" name="TextBox 11"/>
+          <p:cNvSpPr txBox="1"/>
+          <p:nvPr/>
+        </p:nvSpPr>
+        <p:spPr>
+          <a:xfrm>
+            <a:off x="5852160" y="6446520"/>
+            <a:ext cx="2194560" cy="256032"/>
+          </a:xfrm>
+          <a:prstGeom prst="rect">
+            <a:avLst/>
+          </a:prstGeom>
+          <a:noFill/>
+        </p:spPr>
+        <p:txBody>
+          <a:bodyPr wrap="none" lIns="0" rIns="0" tIns="0" bIns="0">
+            <a:spAutoFit/>
+          </a:bodyPr>
+          <a:lstStyle/>
+          <a:p>
+            <a:r>
+              <a:rPr sz="800" b="1">
+                <a:solidFill>
+                  <a:srgbClr val="64748B"/>
+                </a:solidFill>
+                <a:latin typeface="Calibri"/>
+              </a:rPr>
+              <a:t>DOCUMENT</a:t>
+            </a:r>
+          </a:p>
+        </p:txBody>
+      </p:sp>
+      <p:sp>
+        <p:nvSpPr>
+          <p:cNvPr id="13" name="TextBox 12"/>
+          <p:cNvSpPr txBox="1"/>
+          <p:nvPr/>
+        </p:nvSpPr>
+        <p:spPr>
+          <a:xfrm>
+            <a:off x="5852160" y="6629400"/>
+            <a:ext cx="2194560" cy="256032"/>
+          </a:xfrm>
+          <a:prstGeom prst="rect">
+            <a:avLst/>
+          </a:prstGeom>
+          <a:noFill/>
+        </p:spPr>
+        <p:txBody>
+          <a:bodyPr wrap="none" lIns="0" rIns="0" tIns="0" bIns="0">
+            <a:spAutoFit/>
+          </a:bodyPr>
+          <a:lstStyle/>
+          <a:p>
+            <a:r>
+              <a:rPr sz="1000" b="1">
+                <a:solidFill>
+                  <a:srgbClr val="0F172A"/>
+                </a:solidFill>
+                <a:latin typeface="Calibri"/>
+              </a:rPr>
+              <a:t>Pre-Final V0.5  ·  Slide 13</a:t>
+            </a:r>
+          </a:p>
+        </p:txBody>
+      </p:sp>
+    </p:spTree>
+  </p:cSld>
+  <p:clrMapOvr>
+    <a:masterClrMapping/>
+  </p:clrMapOvr>
+</p:sld>
+</file>
+
 <file path=ppt/slides/slide2.xml><?xml version="1.0" encoding="utf-8"?>
 <p:sld xmlns:a="http://schemas.openxmlformats.org/drawingml/2006/main" xmlns:p="http://schemas.openxmlformats.org/presentationml/2006/main" xmlns:r="http://schemas.openxmlformats.org/officeDocument/2006/relationships">
   <p:cSld>
@@ -7172,7 +7592,7 @@
                 </a:solidFill>
                 <a:latin typeface="Calibri"/>
               </a:rPr>
-              <a:t>02 / 12</a:t>
+              <a:t>02 / 13</a:t>
             </a:r>
           </a:p>
         </p:txBody>
@@ -8479,7 +8899,7 @@
                 </a:solidFill>
                 <a:latin typeface="Calibri"/>
               </a:rPr>
-              <a:t>03 / 12</a:t>
+              <a:t>03 / 13</a:t>
             </a:r>
           </a:p>
         </p:txBody>
@@ -9658,7 +10078,7 @@
                 </a:solidFill>
                 <a:latin typeface="Calibri"/>
               </a:rPr>
-              <a:t>04 / 12</a:t>
+              <a:t>04 / 13</a:t>
             </a:r>
           </a:p>
         </p:txBody>
@@ -11104,7 +11524,7 @@
                 </a:solidFill>
                 <a:latin typeface="Calibri"/>
               </a:rPr>
-              <a:t>05 / 12</a:t>
+              <a:t>05 / 13</a:t>
             </a:r>
           </a:p>
         </p:txBody>
@@ -12112,7 +12532,7 @@
                 </a:solidFill>
                 <a:latin typeface="Calibri"/>
               </a:rPr>
-              <a:t>06 / 12</a:t>
+              <a:t>06 / 13</a:t>
             </a:r>
           </a:p>
         </p:txBody>
@@ -13440,7 +13860,7 @@
                 </a:solidFill>
                 <a:latin typeface="Calibri"/>
               </a:rPr>
-              <a:t>07 / 12</a:t>
+              <a:t>07 / 13</a:t>
             </a:r>
           </a:p>
         </p:txBody>
@@ -14986,7 +15406,7 @@
                 </a:solidFill>
                 <a:latin typeface="Calibri"/>
               </a:rPr>
-              <a:t>08 / 12</a:t>
+              <a:t>08 / 13</a:t>
             </a:r>
           </a:p>
         </p:txBody>
@@ -16296,7 +16716,7 @@
                 </a:solidFill>
                 <a:latin typeface="Calibri"/>
               </a:rPr>
-              <a:t>09 / 12</a:t>
+              <a:t>09 / 13</a:t>
             </a:r>
           </a:p>
         </p:txBody>
